--- a/입학연수과정/텀 프로젝트/객체 인식과 추론을 활용한 자율 충전 변전소 드론.pptx
+++ b/입학연수과정/텀 프로젝트/객체 인식과 추론을 활용한 자율 충전 변전소 드론.pptx
@@ -193,7 +193,7 @@
           <a:p>
             <a:fld id="{1D8BD707-D9CF-40AE-B4C6-C98DA3205C09}" type="datetimeFigureOut">
               <a:rPr lang="en-US"/>
-              <a:t>8/16/2026</a:t>
+              <a:t>8/18/2026</a:t>
             </a:fld>
             <a:endParaRPr lang="en-US"/>
           </a:p>
@@ -370,7 +370,7 @@
           <a:p>
             <a:fld id="{1D8BD707-D9CF-40AE-B4C6-C98DA3205C09}" type="datetimeFigureOut">
               <a:rPr lang="en-US"/>
-              <a:t>8/16/2026</a:t>
+              <a:t>8/18/2026</a:t>
             </a:fld>
             <a:endParaRPr lang="en-US"/>
           </a:p>
@@ -584,7 +584,7 @@
           <a:p>
             <a:fld id="{1D8BD707-D9CF-40AE-B4C6-C98DA3205C09}" type="datetimeFigureOut">
               <a:rPr lang="en-US"/>
-              <a:t>8/16/2026</a:t>
+              <a:t>8/18/2026</a:t>
             </a:fld>
             <a:endParaRPr lang="en-US"/>
           </a:p>
@@ -732,7 +732,7 @@
           <a:p>
             <a:fld id="{1D8BD707-D9CF-40AE-B4C6-C98DA3205C09}" type="datetimeFigureOut">
               <a:rPr lang="en-US"/>
-              <a:t>8/16/2026</a:t>
+              <a:t>8/18/2026</a:t>
             </a:fld>
             <a:endParaRPr lang="en-US"/>
           </a:p>
@@ -851,7 +851,7 @@
           <a:p>
             <a:fld id="{1D8BD707-D9CF-40AE-B4C6-C98DA3205C09}" type="datetimeFigureOut">
               <a:rPr lang="en-US"/>
-              <a:t>8/16/2026</a:t>
+              <a:t>8/18/2026</a:t>
             </a:fld>
             <a:endParaRPr lang="en-US"/>
           </a:p>
@@ -1311,7 +1311,7 @@
           <a:p>
             <a:fld id="{1D8BD707-D9CF-40AE-B4C6-C98DA3205C09}" type="datetimeFigureOut">
               <a:rPr lang="en-US"/>
-              <a:t>8/16/2026</a:t>
+              <a:t>8/18/2026</a:t>
             </a:fld>
             <a:endParaRPr lang="en-US"/>
           </a:p>
@@ -8848,7 +8848,7 @@
         <p:spPr>
           <a:xfrm>
             <a:off x="6495051" y="305205"/>
-            <a:ext cx="5297805" cy="370205"/>
+            <a:ext cx="5297805" cy="321883"/>
           </a:xfrm>
           <a:prstGeom prst="rect">
             <a:avLst/>
@@ -8860,7 +8860,7 @@
           </a:bodyPr>
           <a:lstStyle/>
           <a:p>
-            <a:pPr marL="12700">
+            <a:pPr marL="12700" algn="ctr">
               <a:lnSpc>
                 <a:spcPct val="100000"/>
               </a:lnSpc>
@@ -8869,249 +8869,15 @@
               </a:spcBef>
             </a:pPr>
             <a:r>
-              <a:rPr sz="2000" spc="-20" dirty="0">
-                <a:solidFill>
-                  <a:srgbClr val="535353"/>
-                </a:solidFill>
-                <a:latin typeface="Verdana"/>
-                <a:cs typeface="Verdana"/>
-              </a:rPr>
-              <a:t>AI</a:t>
-            </a:r>
-            <a:r>
-              <a:rPr sz="2000" spc="10" dirty="0">
-                <a:solidFill>
-                  <a:srgbClr val="535353"/>
-                </a:solidFill>
-                <a:latin typeface="Verdana"/>
-                <a:cs typeface="Verdana"/>
-              </a:rPr>
-              <a:t> </a:t>
-            </a:r>
-            <a:r>
-              <a:rPr sz="2250" spc="-385" dirty="0">
-                <a:solidFill>
-                  <a:srgbClr val="535353"/>
-                </a:solidFill>
-                <a:latin typeface="Malgun Gothic"/>
-                <a:cs typeface="Malgun Gothic"/>
-              </a:rPr>
-              <a:t>올인원</a:t>
-            </a:r>
-            <a:r>
-              <a:rPr sz="2250" spc="-5" dirty="0">
-                <a:solidFill>
-                  <a:srgbClr val="535353"/>
-                </a:solidFill>
-                <a:latin typeface="Malgun Gothic"/>
-                <a:cs typeface="Malgun Gothic"/>
-              </a:rPr>
-              <a:t> </a:t>
-            </a:r>
-            <a:r>
-              <a:rPr sz="2000" spc="-315" dirty="0">
-                <a:solidFill>
-                  <a:srgbClr val="535353"/>
-                </a:solidFill>
-                <a:latin typeface="Verdana"/>
-                <a:cs typeface="Verdana"/>
-              </a:rPr>
-              <a:t>2</a:t>
-            </a:r>
-            <a:r>
-              <a:rPr sz="2250" spc="-315" dirty="0">
-                <a:solidFill>
-                  <a:srgbClr val="535353"/>
-                </a:solidFill>
-                <a:latin typeface="Malgun Gothic"/>
-                <a:cs typeface="Malgun Gothic"/>
-              </a:rPr>
-              <a:t>기</a:t>
-            </a:r>
-            <a:r>
-              <a:rPr sz="2250" spc="45" dirty="0">
-                <a:solidFill>
-                  <a:srgbClr val="535353"/>
-                </a:solidFill>
-                <a:latin typeface="Malgun Gothic"/>
-                <a:cs typeface="Malgun Gothic"/>
-              </a:rPr>
-              <a:t> </a:t>
-            </a:r>
-            <a:r>
-              <a:rPr sz="2250" spc="-540" dirty="0">
-                <a:solidFill>
-                  <a:srgbClr val="535353"/>
-                </a:solidFill>
-                <a:latin typeface="Malgun Gothic"/>
-                <a:cs typeface="Malgun Gothic"/>
-              </a:rPr>
-              <a:t>입</a:t>
-            </a:r>
-            <a:r>
-              <a:rPr sz="2250" spc="-570" dirty="0">
-                <a:solidFill>
-                  <a:srgbClr val="535353"/>
-                </a:solidFill>
-                <a:latin typeface="Malgun Gothic"/>
-                <a:cs typeface="Malgun Gothic"/>
-              </a:rPr>
-              <a:t> </a:t>
-            </a:r>
-            <a:r>
-              <a:rPr sz="2250" spc="-360" dirty="0">
-                <a:solidFill>
-                  <a:srgbClr val="535353"/>
-                </a:solidFill>
-                <a:latin typeface="Malgun Gothic"/>
-                <a:cs typeface="Malgun Gothic"/>
-              </a:rPr>
-              <a:t>학연수과정</a:t>
-            </a:r>
-            <a:r>
-              <a:rPr sz="2250" spc="30" dirty="0">
-                <a:solidFill>
-                  <a:srgbClr val="535353"/>
-                </a:solidFill>
-                <a:latin typeface="Malgun Gothic"/>
-                <a:cs typeface="Malgun Gothic"/>
-              </a:rPr>
-              <a:t> </a:t>
-            </a:r>
-            <a:r>
-              <a:rPr sz="2000" dirty="0">
-                <a:solidFill>
-                  <a:srgbClr val="535353"/>
-                </a:solidFill>
-                <a:latin typeface="Verdana"/>
-                <a:cs typeface="Verdana"/>
-              </a:rPr>
-              <a:t>TERM-</a:t>
-            </a:r>
-            <a:r>
-              <a:rPr sz="2000" spc="80" dirty="0">
-                <a:solidFill>
-                  <a:srgbClr val="535353"/>
-                </a:solidFill>
-                <a:latin typeface="Verdana"/>
-                <a:cs typeface="Verdana"/>
-              </a:rPr>
-              <a:t>PROJECT</a:t>
+              <a:rPr lang="ko-KR" altLang="en-US" sz="2000" dirty="0">
+                <a:latin typeface="Verdana"/>
+                <a:cs typeface="Verdana"/>
+              </a:rPr>
+              <a:t>시스템 구성 </a:t>
             </a:r>
             <a:endParaRPr sz="2000" dirty="0">
               <a:latin typeface="Verdana"/>
               <a:cs typeface="Verdana"/>
-            </a:endParaRPr>
-          </a:p>
-        </p:txBody>
-      </p:sp>
-      <p:sp>
-        <p:nvSpPr>
-          <p:cNvPr id="13" name="object 13" descr="$PPTXTitle"/>
-          <p:cNvSpPr txBox="1">
-            <a:spLocks noGrp="1"/>
-          </p:cNvSpPr>
-          <p:nvPr>
-            <p:ph type="title"/>
-          </p:nvPr>
-        </p:nvSpPr>
-        <p:spPr>
-          <a:prstGeom prst="rect">
-            <a:avLst/>
-          </a:prstGeom>
-        </p:spPr>
-        <p:txBody>
-          <a:bodyPr vert="horz" wrap="square" lIns="0" tIns="12065" rIns="0" bIns="0" rtlCol="0">
-            <a:spAutoFit/>
-          </a:bodyPr>
-          <a:lstStyle/>
-          <a:p>
-            <a:pPr marL="12700">
-              <a:lnSpc>
-                <a:spcPct val="100000"/>
-              </a:lnSpc>
-              <a:spcBef>
-                <a:spcPts val="95"/>
-              </a:spcBef>
-            </a:pPr>
-            <a:r>
-              <a:rPr sz="6200" spc="-7434" dirty="0">
-                <a:solidFill>
-                  <a:srgbClr val="231F20"/>
-                </a:solidFill>
-                <a:latin typeface="Malgun Gothic"/>
-                <a:cs typeface="Malgun Gothic"/>
-              </a:rPr>
-              <a:t>제</a:t>
-            </a:r>
-            <a:r>
-              <a:rPr sz="6250" spc="-1460" dirty="0">
-                <a:latin typeface="Malgun Gothic"/>
-                <a:cs typeface="Malgun Gothic"/>
-              </a:rPr>
-              <a:t>제</a:t>
-            </a:r>
-            <a:r>
-              <a:rPr sz="6200" spc="-7400" dirty="0">
-                <a:solidFill>
-                  <a:srgbClr val="231F20"/>
-                </a:solidFill>
-                <a:latin typeface="Malgun Gothic"/>
-                <a:cs typeface="Malgun Gothic"/>
-              </a:rPr>
-              <a:t>출</a:t>
-            </a:r>
-            <a:r>
-              <a:rPr sz="6250" spc="-1155" dirty="0">
-                <a:latin typeface="Malgun Gothic"/>
-                <a:cs typeface="Malgun Gothic"/>
-              </a:rPr>
-              <a:t>출</a:t>
-            </a:r>
-            <a:r>
-              <a:rPr sz="6250" spc="-1700" dirty="0">
-                <a:latin typeface="Malgun Gothic"/>
-                <a:cs typeface="Malgun Gothic"/>
-              </a:rPr>
-              <a:t> </a:t>
-            </a:r>
-            <a:r>
-              <a:rPr sz="6200" spc="-7030" dirty="0">
-                <a:solidFill>
-                  <a:srgbClr val="231F20"/>
-                </a:solidFill>
-                <a:latin typeface="Malgun Gothic"/>
-                <a:cs typeface="Malgun Gothic"/>
-              </a:rPr>
-              <a:t>자</a:t>
-            </a:r>
-            <a:r>
-              <a:rPr sz="6250" spc="-1614" dirty="0">
-                <a:latin typeface="Malgun Gothic"/>
-                <a:cs typeface="Malgun Gothic"/>
-              </a:rPr>
-              <a:t>자</a:t>
-            </a:r>
-            <a:r>
-              <a:rPr sz="6200" spc="-7075" dirty="0">
-                <a:solidFill>
-                  <a:srgbClr val="231F20"/>
-                </a:solidFill>
-                <a:latin typeface="Malgun Gothic"/>
-                <a:cs typeface="Malgun Gothic"/>
-              </a:rPr>
-              <a:t>료</a:t>
-            </a:r>
-            <a:r>
-              <a:rPr sz="6250" spc="-800" dirty="0">
-                <a:latin typeface="Malgun Gothic"/>
-                <a:cs typeface="Malgun Gothic"/>
-              </a:rPr>
-              <a:t>료</a:t>
-            </a:r>
-            <a:endParaRPr sz="6250">
-              <a:latin typeface="Malgun Gothic"/>
-              <a:cs typeface="Malgun Gothic"/>
             </a:endParaRPr>
           </a:p>
         </p:txBody>
@@ -9124,8 +8890,8 @@
         </p:nvSpPr>
         <p:spPr>
           <a:xfrm>
-            <a:off x="1410880" y="2057563"/>
-            <a:ext cx="7567295" cy="7684770"/>
+            <a:off x="1371600" y="1114425"/>
+            <a:ext cx="15544800" cy="8753475"/>
           </a:xfrm>
           <a:custGeom>
             <a:avLst/>
@@ -9360,2076 +9126,42 @@
           </a:p>
         </p:txBody>
       </p:sp>
-      <p:sp>
-        <p:nvSpPr>
-          <p:cNvPr id="2" name="object 2"/>
-          <p:cNvSpPr/>
-          <p:nvPr/>
-        </p:nvSpPr>
-        <p:spPr>
-          <a:xfrm>
-            <a:off x="9338667" y="2638682"/>
-            <a:ext cx="7565390" cy="2848610"/>
-          </a:xfrm>
-          <a:custGeom>
-            <a:avLst/>
-            <a:gdLst/>
-            <a:ahLst/>
-            <a:cxnLst/>
-            <a:rect l="l" t="t" r="r" b="b"/>
-            <a:pathLst>
-              <a:path w="7565390" h="2848610">
-                <a:moveTo>
-                  <a:pt x="7090661" y="2848004"/>
-                </a:moveTo>
-                <a:lnTo>
-                  <a:pt x="476257" y="2848004"/>
-                </a:lnTo>
-                <a:lnTo>
-                  <a:pt x="427561" y="2845532"/>
-                </a:lnTo>
-                <a:lnTo>
-                  <a:pt x="380271" y="2838316"/>
-                </a:lnTo>
-                <a:lnTo>
-                  <a:pt x="334629" y="2826581"/>
-                </a:lnTo>
-                <a:lnTo>
-                  <a:pt x="290872" y="2810567"/>
-                </a:lnTo>
-                <a:lnTo>
-                  <a:pt x="249241" y="2790514"/>
-                </a:lnTo>
-                <a:lnTo>
-                  <a:pt x="209974" y="2766659"/>
-                </a:lnTo>
-                <a:lnTo>
-                  <a:pt x="173311" y="2739244"/>
-                </a:lnTo>
-                <a:lnTo>
-                  <a:pt x="139491" y="2708507"/>
-                </a:lnTo>
-                <a:lnTo>
-                  <a:pt x="108754" y="2674687"/>
-                </a:lnTo>
-                <a:lnTo>
-                  <a:pt x="81339" y="2638024"/>
-                </a:lnTo>
-                <a:lnTo>
-                  <a:pt x="57485" y="2598757"/>
-                </a:lnTo>
-                <a:lnTo>
-                  <a:pt x="37431" y="2557126"/>
-                </a:lnTo>
-                <a:lnTo>
-                  <a:pt x="21417" y="2513369"/>
-                </a:lnTo>
-                <a:lnTo>
-                  <a:pt x="9682" y="2467727"/>
-                </a:lnTo>
-                <a:lnTo>
-                  <a:pt x="2466" y="2420438"/>
-                </a:lnTo>
-                <a:lnTo>
-                  <a:pt x="0" y="2371741"/>
-                </a:lnTo>
-                <a:lnTo>
-                  <a:pt x="0" y="476251"/>
-                </a:lnTo>
-                <a:lnTo>
-                  <a:pt x="2466" y="427557"/>
-                </a:lnTo>
-                <a:lnTo>
-                  <a:pt x="9682" y="380269"/>
-                </a:lnTo>
-                <a:lnTo>
-                  <a:pt x="21417" y="334628"/>
-                </a:lnTo>
-                <a:lnTo>
-                  <a:pt x="37431" y="290872"/>
-                </a:lnTo>
-                <a:lnTo>
-                  <a:pt x="57485" y="249241"/>
-                </a:lnTo>
-                <a:lnTo>
-                  <a:pt x="81339" y="209974"/>
-                </a:lnTo>
-                <a:lnTo>
-                  <a:pt x="108754" y="173311"/>
-                </a:lnTo>
-                <a:lnTo>
-                  <a:pt x="139491" y="139490"/>
-                </a:lnTo>
-                <a:lnTo>
-                  <a:pt x="173311" y="108753"/>
-                </a:lnTo>
-                <a:lnTo>
-                  <a:pt x="209974" y="81336"/>
-                </a:lnTo>
-                <a:lnTo>
-                  <a:pt x="249241" y="57481"/>
-                </a:lnTo>
-                <a:lnTo>
-                  <a:pt x="290872" y="37427"/>
-                </a:lnTo>
-                <a:lnTo>
-                  <a:pt x="334629" y="21412"/>
-                </a:lnTo>
-                <a:lnTo>
-                  <a:pt x="380271" y="9676"/>
-                </a:lnTo>
-                <a:lnTo>
-                  <a:pt x="427561" y="2459"/>
-                </a:lnTo>
-                <a:lnTo>
-                  <a:pt x="476257" y="0"/>
-                </a:lnTo>
-                <a:lnTo>
-                  <a:pt x="7090661" y="0"/>
-                </a:lnTo>
-                <a:lnTo>
-                  <a:pt x="7139358" y="2459"/>
-                </a:lnTo>
-                <a:lnTo>
-                  <a:pt x="7186647" y="9676"/>
-                </a:lnTo>
-                <a:lnTo>
-                  <a:pt x="7232290" y="21412"/>
-                </a:lnTo>
-                <a:lnTo>
-                  <a:pt x="7276046" y="37427"/>
-                </a:lnTo>
-                <a:lnTo>
-                  <a:pt x="7317678" y="57481"/>
-                </a:lnTo>
-                <a:lnTo>
-                  <a:pt x="7356945" y="81336"/>
-                </a:lnTo>
-                <a:lnTo>
-                  <a:pt x="7393607" y="108753"/>
-                </a:lnTo>
-                <a:lnTo>
-                  <a:pt x="7427427" y="139490"/>
-                </a:lnTo>
-                <a:lnTo>
-                  <a:pt x="7458164" y="173311"/>
-                </a:lnTo>
-                <a:lnTo>
-                  <a:pt x="7485580" y="209974"/>
-                </a:lnTo>
-                <a:lnTo>
-                  <a:pt x="7509434" y="249241"/>
-                </a:lnTo>
-                <a:lnTo>
-                  <a:pt x="7529488" y="290872"/>
-                </a:lnTo>
-                <a:lnTo>
-                  <a:pt x="7545501" y="334628"/>
-                </a:lnTo>
-                <a:lnTo>
-                  <a:pt x="7557236" y="380269"/>
-                </a:lnTo>
-                <a:lnTo>
-                  <a:pt x="7564453" y="427557"/>
-                </a:lnTo>
-                <a:lnTo>
-                  <a:pt x="7565012" y="438631"/>
-                </a:lnTo>
-                <a:lnTo>
-                  <a:pt x="7565012" y="2409362"/>
-                </a:lnTo>
-                <a:lnTo>
-                  <a:pt x="7557236" y="2467727"/>
-                </a:lnTo>
-                <a:lnTo>
-                  <a:pt x="7545501" y="2513369"/>
-                </a:lnTo>
-                <a:lnTo>
-                  <a:pt x="7529488" y="2557126"/>
-                </a:lnTo>
-                <a:lnTo>
-                  <a:pt x="7509434" y="2598757"/>
-                </a:lnTo>
-                <a:lnTo>
-                  <a:pt x="7485580" y="2638024"/>
-                </a:lnTo>
-                <a:lnTo>
-                  <a:pt x="7458164" y="2674687"/>
-                </a:lnTo>
-                <a:lnTo>
-                  <a:pt x="7427427" y="2708507"/>
-                </a:lnTo>
-                <a:lnTo>
-                  <a:pt x="7393607" y="2739244"/>
-                </a:lnTo>
-                <a:lnTo>
-                  <a:pt x="7356945" y="2766659"/>
-                </a:lnTo>
-                <a:lnTo>
-                  <a:pt x="7317678" y="2790514"/>
-                </a:lnTo>
-                <a:lnTo>
-                  <a:pt x="7276046" y="2810567"/>
-                </a:lnTo>
-                <a:lnTo>
-                  <a:pt x="7232290" y="2826581"/>
-                </a:lnTo>
-                <a:lnTo>
-                  <a:pt x="7186647" y="2838316"/>
-                </a:lnTo>
-                <a:lnTo>
-                  <a:pt x="7139358" y="2845532"/>
-                </a:lnTo>
-                <a:lnTo>
-                  <a:pt x="7090661" y="2848004"/>
-                </a:lnTo>
-                <a:close/>
-              </a:path>
-            </a:pathLst>
-          </a:custGeom>
-          <a:solidFill>
-            <a:srgbClr val="F1F1F1"/>
-          </a:solidFill>
-        </p:spPr>
-        <p:txBody>
-          <a:bodyPr wrap="square" lIns="0" tIns="0" rIns="0" bIns="0" rtlCol="0"/>
-          <a:lstStyle/>
-          <a:p>
-            <a:endParaRPr/>
-          </a:p>
-        </p:txBody>
-      </p:sp>
-      <p:sp>
-        <p:nvSpPr>
-          <p:cNvPr id="7" name="object 7"/>
-          <p:cNvSpPr/>
-          <p:nvPr/>
-        </p:nvSpPr>
-        <p:spPr>
-          <a:xfrm>
-            <a:off x="11455995" y="2129539"/>
-            <a:ext cx="3164840" cy="686435"/>
-          </a:xfrm>
-          <a:custGeom>
-            <a:avLst/>
-            <a:gdLst/>
-            <a:ahLst/>
-            <a:cxnLst/>
-            <a:rect l="l" t="t" r="r" b="b"/>
-            <a:pathLst>
-              <a:path w="3164840" h="686435">
-                <a:moveTo>
-                  <a:pt x="2821681" y="685989"/>
-                </a:moveTo>
-                <a:lnTo>
-                  <a:pt x="342995" y="685989"/>
-                </a:lnTo>
-                <a:lnTo>
-                  <a:pt x="289015" y="681716"/>
-                </a:lnTo>
-                <a:lnTo>
-                  <a:pt x="236850" y="669152"/>
-                </a:lnTo>
-                <a:lnTo>
-                  <a:pt x="187422" y="648678"/>
-                </a:lnTo>
-                <a:lnTo>
-                  <a:pt x="141651" y="620676"/>
-                </a:lnTo>
-                <a:lnTo>
-                  <a:pt x="100460" y="585527"/>
-                </a:lnTo>
-                <a:lnTo>
-                  <a:pt x="65312" y="544337"/>
-                </a:lnTo>
-                <a:lnTo>
-                  <a:pt x="37310" y="498567"/>
-                </a:lnTo>
-                <a:lnTo>
-                  <a:pt x="16836" y="449139"/>
-                </a:lnTo>
-                <a:lnTo>
-                  <a:pt x="4272" y="396975"/>
-                </a:lnTo>
-                <a:lnTo>
-                  <a:pt x="0" y="342995"/>
-                </a:lnTo>
-                <a:lnTo>
-                  <a:pt x="4272" y="289014"/>
-                </a:lnTo>
-                <a:lnTo>
-                  <a:pt x="16836" y="236850"/>
-                </a:lnTo>
-                <a:lnTo>
-                  <a:pt x="37310" y="187421"/>
-                </a:lnTo>
-                <a:lnTo>
-                  <a:pt x="65312" y="141651"/>
-                </a:lnTo>
-                <a:lnTo>
-                  <a:pt x="100460" y="100460"/>
-                </a:lnTo>
-                <a:lnTo>
-                  <a:pt x="141651" y="65312"/>
-                </a:lnTo>
-                <a:lnTo>
-                  <a:pt x="187422" y="37310"/>
-                </a:lnTo>
-                <a:lnTo>
-                  <a:pt x="236850" y="16836"/>
-                </a:lnTo>
-                <a:lnTo>
-                  <a:pt x="289015" y="4272"/>
-                </a:lnTo>
-                <a:lnTo>
-                  <a:pt x="342995" y="0"/>
-                </a:lnTo>
-                <a:lnTo>
-                  <a:pt x="2821681" y="0"/>
-                </a:lnTo>
-                <a:lnTo>
-                  <a:pt x="2875661" y="4272"/>
-                </a:lnTo>
-                <a:lnTo>
-                  <a:pt x="2927826" y="16836"/>
-                </a:lnTo>
-                <a:lnTo>
-                  <a:pt x="2977255" y="37310"/>
-                </a:lnTo>
-                <a:lnTo>
-                  <a:pt x="3023026" y="65312"/>
-                </a:lnTo>
-                <a:lnTo>
-                  <a:pt x="3064219" y="100460"/>
-                </a:lnTo>
-                <a:lnTo>
-                  <a:pt x="3099363" y="141651"/>
-                </a:lnTo>
-                <a:lnTo>
-                  <a:pt x="3127365" y="187421"/>
-                </a:lnTo>
-                <a:lnTo>
-                  <a:pt x="3147841" y="236850"/>
-                </a:lnTo>
-                <a:lnTo>
-                  <a:pt x="3160407" y="289014"/>
-                </a:lnTo>
-                <a:lnTo>
-                  <a:pt x="3164681" y="342995"/>
-                </a:lnTo>
-                <a:lnTo>
-                  <a:pt x="3160407" y="396975"/>
-                </a:lnTo>
-                <a:lnTo>
-                  <a:pt x="3147841" y="449139"/>
-                </a:lnTo>
-                <a:lnTo>
-                  <a:pt x="3127365" y="498567"/>
-                </a:lnTo>
-                <a:lnTo>
-                  <a:pt x="3099363" y="544337"/>
-                </a:lnTo>
-                <a:lnTo>
-                  <a:pt x="3064219" y="585527"/>
-                </a:lnTo>
-                <a:lnTo>
-                  <a:pt x="3023026" y="620676"/>
-                </a:lnTo>
-                <a:lnTo>
-                  <a:pt x="2977255" y="648678"/>
-                </a:lnTo>
-                <a:lnTo>
-                  <a:pt x="2927826" y="669152"/>
-                </a:lnTo>
-                <a:lnTo>
-                  <a:pt x="2875661" y="681716"/>
-                </a:lnTo>
-                <a:lnTo>
-                  <a:pt x="2821681" y="685989"/>
-                </a:lnTo>
-                <a:close/>
-              </a:path>
-            </a:pathLst>
-          </a:custGeom>
-          <a:solidFill>
-            <a:srgbClr val="D8D8D8">
-              <a:alpha val="69999"/>
-            </a:srgbClr>
-          </a:solidFill>
-        </p:spPr>
-        <p:txBody>
-          <a:bodyPr wrap="square" lIns="0" tIns="0" rIns="0" bIns="0" rtlCol="0"/>
-          <a:lstStyle/>
-          <a:p>
-            <a:endParaRPr/>
-          </a:p>
-        </p:txBody>
-      </p:sp>
       <p:pic>
         <p:nvPicPr>
-          <p:cNvPr id="12" name="object 12"/>
-          <p:cNvPicPr/>
+          <p:cNvPr id="20" name="그림 19">
+            <a:extLst>
+              <a:ext uri="{FF2B5EF4-FFF2-40B4-BE49-F238E27FC236}">
+                <a16:creationId xmlns:a16="http://schemas.microsoft.com/office/drawing/2014/main" id="{13C9F47D-822A-A81E-DFD3-B436312A8615}"/>
+              </a:ext>
+            </a:extLst>
+          </p:cNvPr>
+          <p:cNvPicPr>
+            <a:picLocks noChangeAspect="1"/>
+          </p:cNvPicPr>
           <p:nvPr/>
         </p:nvPicPr>
         <p:blipFill>
-          <a:blip r:embed="rId2" cstate="print"/>
+          <a:blip r:embed="rId2">
+            <a:extLst>
+              <a:ext uri="{28A0092B-C50C-407E-A947-70E740481C1C}">
+                <a14:useLocalDpi xmlns:a14="http://schemas.microsoft.com/office/drawing/2010/main" val="0"/>
+              </a:ext>
+            </a:extLst>
+          </a:blip>
           <a:stretch>
             <a:fillRect/>
           </a:stretch>
         </p:blipFill>
         <p:spPr>
           <a:xfrm>
-            <a:off x="2529894" y="2465929"/>
-            <a:ext cx="5324459" cy="6972293"/>
+            <a:off x="2609426" y="1333905"/>
+            <a:ext cx="13069148" cy="8315679"/>
           </a:xfrm>
           <a:prstGeom prst="rect">
             <a:avLst/>
           </a:prstGeom>
         </p:spPr>
       </p:pic>
-      <p:sp>
-        <p:nvSpPr>
-          <p:cNvPr id="4" name="object 4"/>
-          <p:cNvSpPr/>
-          <p:nvPr/>
-        </p:nvSpPr>
-        <p:spPr>
-          <a:xfrm>
-            <a:off x="9984302" y="3066775"/>
-            <a:ext cx="6275705" cy="871219"/>
-          </a:xfrm>
-          <a:custGeom>
-            <a:avLst/>
-            <a:gdLst/>
-            <a:ahLst/>
-            <a:cxnLst/>
-            <a:rect l="l" t="t" r="r" b="b"/>
-            <a:pathLst>
-              <a:path w="6275705" h="871220">
-                <a:moveTo>
-                  <a:pt x="5840180" y="870904"/>
-                </a:moveTo>
-                <a:lnTo>
-                  <a:pt x="435467" y="870904"/>
-                </a:lnTo>
-                <a:lnTo>
-                  <a:pt x="386332" y="868125"/>
-                </a:lnTo>
-                <a:lnTo>
-                  <a:pt x="338203" y="859905"/>
-                </a:lnTo>
-                <a:lnTo>
-                  <a:pt x="291504" y="846420"/>
-                </a:lnTo>
-                <a:lnTo>
-                  <a:pt x="246664" y="827845"/>
-                </a:lnTo>
-                <a:lnTo>
-                  <a:pt x="204109" y="804357"/>
-                </a:lnTo>
-                <a:lnTo>
-                  <a:pt x="164265" y="776132"/>
-                </a:lnTo>
-                <a:lnTo>
-                  <a:pt x="127558" y="743346"/>
-                </a:lnTo>
-                <a:lnTo>
-                  <a:pt x="94781" y="706639"/>
-                </a:lnTo>
-                <a:lnTo>
-                  <a:pt x="66560" y="666796"/>
-                </a:lnTo>
-                <a:lnTo>
-                  <a:pt x="43072" y="624242"/>
-                </a:lnTo>
-                <a:lnTo>
-                  <a:pt x="24494" y="579405"/>
-                </a:lnTo>
-                <a:lnTo>
-                  <a:pt x="11004" y="532712"/>
-                </a:lnTo>
-                <a:lnTo>
-                  <a:pt x="2780" y="484591"/>
-                </a:lnTo>
-                <a:lnTo>
-                  <a:pt x="0" y="435467"/>
-                </a:lnTo>
-                <a:lnTo>
-                  <a:pt x="2780" y="386332"/>
-                </a:lnTo>
-                <a:lnTo>
-                  <a:pt x="11004" y="338203"/>
-                </a:lnTo>
-                <a:lnTo>
-                  <a:pt x="24494" y="291504"/>
-                </a:lnTo>
-                <a:lnTo>
-                  <a:pt x="43072" y="246664"/>
-                </a:lnTo>
-                <a:lnTo>
-                  <a:pt x="66560" y="204109"/>
-                </a:lnTo>
-                <a:lnTo>
-                  <a:pt x="94781" y="164265"/>
-                </a:lnTo>
-                <a:lnTo>
-                  <a:pt x="127558" y="127558"/>
-                </a:lnTo>
-                <a:lnTo>
-                  <a:pt x="164265" y="94781"/>
-                </a:lnTo>
-                <a:lnTo>
-                  <a:pt x="204109" y="66560"/>
-                </a:lnTo>
-                <a:lnTo>
-                  <a:pt x="246664" y="43072"/>
-                </a:lnTo>
-                <a:lnTo>
-                  <a:pt x="291504" y="24494"/>
-                </a:lnTo>
-                <a:lnTo>
-                  <a:pt x="338203" y="11004"/>
-                </a:lnTo>
-                <a:lnTo>
-                  <a:pt x="386332" y="2780"/>
-                </a:lnTo>
-                <a:lnTo>
-                  <a:pt x="435467" y="0"/>
-                </a:lnTo>
-                <a:lnTo>
-                  <a:pt x="5840180" y="0"/>
-                </a:lnTo>
-                <a:lnTo>
-                  <a:pt x="5889315" y="2780"/>
-                </a:lnTo>
-                <a:lnTo>
-                  <a:pt x="5937445" y="11004"/>
-                </a:lnTo>
-                <a:lnTo>
-                  <a:pt x="5984143" y="24494"/>
-                </a:lnTo>
-                <a:lnTo>
-                  <a:pt x="6028983" y="43072"/>
-                </a:lnTo>
-                <a:lnTo>
-                  <a:pt x="6071539" y="66560"/>
-                </a:lnTo>
-                <a:lnTo>
-                  <a:pt x="6111383" y="94781"/>
-                </a:lnTo>
-                <a:lnTo>
-                  <a:pt x="6148089" y="127558"/>
-                </a:lnTo>
-                <a:lnTo>
-                  <a:pt x="6180865" y="164265"/>
-                </a:lnTo>
-                <a:lnTo>
-                  <a:pt x="6209082" y="204109"/>
-                </a:lnTo>
-                <a:lnTo>
-                  <a:pt x="6232564" y="246664"/>
-                </a:lnTo>
-                <a:lnTo>
-                  <a:pt x="6251135" y="291504"/>
-                </a:lnTo>
-                <a:lnTo>
-                  <a:pt x="6264619" y="338203"/>
-                </a:lnTo>
-                <a:lnTo>
-                  <a:pt x="6272839" y="386332"/>
-                </a:lnTo>
-                <a:lnTo>
-                  <a:pt x="6275618" y="435467"/>
-                </a:lnTo>
-                <a:lnTo>
-                  <a:pt x="6272839" y="484591"/>
-                </a:lnTo>
-                <a:lnTo>
-                  <a:pt x="6264619" y="532712"/>
-                </a:lnTo>
-                <a:lnTo>
-                  <a:pt x="6251135" y="579405"/>
-                </a:lnTo>
-                <a:lnTo>
-                  <a:pt x="6232564" y="624242"/>
-                </a:lnTo>
-                <a:lnTo>
-                  <a:pt x="6209082" y="666796"/>
-                </a:lnTo>
-                <a:lnTo>
-                  <a:pt x="6180865" y="706639"/>
-                </a:lnTo>
-                <a:lnTo>
-                  <a:pt x="6148089" y="743346"/>
-                </a:lnTo>
-                <a:lnTo>
-                  <a:pt x="6111383" y="776132"/>
-                </a:lnTo>
-                <a:lnTo>
-                  <a:pt x="6071539" y="804357"/>
-                </a:lnTo>
-                <a:lnTo>
-                  <a:pt x="6028983" y="827845"/>
-                </a:lnTo>
-                <a:lnTo>
-                  <a:pt x="5984143" y="846420"/>
-                </a:lnTo>
-                <a:lnTo>
-                  <a:pt x="5937445" y="859905"/>
-                </a:lnTo>
-                <a:lnTo>
-                  <a:pt x="5889315" y="868125"/>
-                </a:lnTo>
-                <a:lnTo>
-                  <a:pt x="5840180" y="870904"/>
-                </a:lnTo>
-                <a:close/>
-              </a:path>
-            </a:pathLst>
-          </a:custGeom>
-          <a:solidFill>
-            <a:srgbClr val="FFFFFF"/>
-          </a:solidFill>
-        </p:spPr>
-        <p:txBody>
-          <a:bodyPr wrap="square" lIns="0" tIns="0" rIns="0" bIns="0" rtlCol="0"/>
-          <a:lstStyle/>
-          <a:p>
-            <a:endParaRPr/>
-          </a:p>
-        </p:txBody>
-      </p:sp>
-      <p:sp>
-        <p:nvSpPr>
-          <p:cNvPr id="5" name="object 5"/>
-          <p:cNvSpPr/>
-          <p:nvPr/>
-        </p:nvSpPr>
-        <p:spPr>
-          <a:xfrm>
-            <a:off x="9984302" y="4166280"/>
-            <a:ext cx="6275705" cy="871219"/>
-          </a:xfrm>
-          <a:custGeom>
-            <a:avLst/>
-            <a:gdLst/>
-            <a:ahLst/>
-            <a:cxnLst/>
-            <a:rect l="l" t="t" r="r" b="b"/>
-            <a:pathLst>
-              <a:path w="6275705" h="871220">
-                <a:moveTo>
-                  <a:pt x="5840180" y="870874"/>
-                </a:moveTo>
-                <a:lnTo>
-                  <a:pt x="435467" y="870874"/>
-                </a:lnTo>
-                <a:lnTo>
-                  <a:pt x="386332" y="868095"/>
-                </a:lnTo>
-                <a:lnTo>
-                  <a:pt x="338203" y="859875"/>
-                </a:lnTo>
-                <a:lnTo>
-                  <a:pt x="291504" y="846392"/>
-                </a:lnTo>
-                <a:lnTo>
-                  <a:pt x="246664" y="827820"/>
-                </a:lnTo>
-                <a:lnTo>
-                  <a:pt x="204109" y="804338"/>
-                </a:lnTo>
-                <a:lnTo>
-                  <a:pt x="164265" y="776121"/>
-                </a:lnTo>
-                <a:lnTo>
-                  <a:pt x="127558" y="743346"/>
-                </a:lnTo>
-                <a:lnTo>
-                  <a:pt x="94781" y="706630"/>
-                </a:lnTo>
-                <a:lnTo>
-                  <a:pt x="66560" y="666782"/>
-                </a:lnTo>
-                <a:lnTo>
-                  <a:pt x="43072" y="624227"/>
-                </a:lnTo>
-                <a:lnTo>
-                  <a:pt x="24494" y="579390"/>
-                </a:lnTo>
-                <a:lnTo>
-                  <a:pt x="11004" y="532696"/>
-                </a:lnTo>
-                <a:lnTo>
-                  <a:pt x="2780" y="484570"/>
-                </a:lnTo>
-                <a:lnTo>
-                  <a:pt x="0" y="435437"/>
-                </a:lnTo>
-                <a:lnTo>
-                  <a:pt x="2780" y="386302"/>
-                </a:lnTo>
-                <a:lnTo>
-                  <a:pt x="11004" y="338172"/>
-                </a:lnTo>
-                <a:lnTo>
-                  <a:pt x="24494" y="291474"/>
-                </a:lnTo>
-                <a:lnTo>
-                  <a:pt x="43072" y="246634"/>
-                </a:lnTo>
-                <a:lnTo>
-                  <a:pt x="66560" y="204078"/>
-                </a:lnTo>
-                <a:lnTo>
-                  <a:pt x="94781" y="164234"/>
-                </a:lnTo>
-                <a:lnTo>
-                  <a:pt x="127558" y="127528"/>
-                </a:lnTo>
-                <a:lnTo>
-                  <a:pt x="164265" y="94753"/>
-                </a:lnTo>
-                <a:lnTo>
-                  <a:pt x="204109" y="66536"/>
-                </a:lnTo>
-                <a:lnTo>
-                  <a:pt x="246664" y="43053"/>
-                </a:lnTo>
-                <a:lnTo>
-                  <a:pt x="291504" y="24482"/>
-                </a:lnTo>
-                <a:lnTo>
-                  <a:pt x="338203" y="10998"/>
-                </a:lnTo>
-                <a:lnTo>
-                  <a:pt x="386332" y="2779"/>
-                </a:lnTo>
-                <a:lnTo>
-                  <a:pt x="435467" y="0"/>
-                </a:lnTo>
-                <a:lnTo>
-                  <a:pt x="5840180" y="0"/>
-                </a:lnTo>
-                <a:lnTo>
-                  <a:pt x="5889315" y="2779"/>
-                </a:lnTo>
-                <a:lnTo>
-                  <a:pt x="5937445" y="10998"/>
-                </a:lnTo>
-                <a:lnTo>
-                  <a:pt x="5984143" y="24482"/>
-                </a:lnTo>
-                <a:lnTo>
-                  <a:pt x="6028983" y="43053"/>
-                </a:lnTo>
-                <a:lnTo>
-                  <a:pt x="6071539" y="66536"/>
-                </a:lnTo>
-                <a:lnTo>
-                  <a:pt x="6111383" y="94753"/>
-                </a:lnTo>
-                <a:lnTo>
-                  <a:pt x="6148089" y="127528"/>
-                </a:lnTo>
-                <a:lnTo>
-                  <a:pt x="6180865" y="164234"/>
-                </a:lnTo>
-                <a:lnTo>
-                  <a:pt x="6209082" y="204078"/>
-                </a:lnTo>
-                <a:lnTo>
-                  <a:pt x="6232564" y="246634"/>
-                </a:lnTo>
-                <a:lnTo>
-                  <a:pt x="6251135" y="291474"/>
-                </a:lnTo>
-                <a:lnTo>
-                  <a:pt x="6264619" y="338172"/>
-                </a:lnTo>
-                <a:lnTo>
-                  <a:pt x="6272839" y="386302"/>
-                </a:lnTo>
-                <a:lnTo>
-                  <a:pt x="6275618" y="435437"/>
-                </a:lnTo>
-                <a:lnTo>
-                  <a:pt x="6272839" y="484570"/>
-                </a:lnTo>
-                <a:lnTo>
-                  <a:pt x="6264619" y="532696"/>
-                </a:lnTo>
-                <a:lnTo>
-                  <a:pt x="6251135" y="579390"/>
-                </a:lnTo>
-                <a:lnTo>
-                  <a:pt x="6232564" y="624227"/>
-                </a:lnTo>
-                <a:lnTo>
-                  <a:pt x="6209082" y="666782"/>
-                </a:lnTo>
-                <a:lnTo>
-                  <a:pt x="6180865" y="706630"/>
-                </a:lnTo>
-                <a:lnTo>
-                  <a:pt x="6148089" y="743346"/>
-                </a:lnTo>
-                <a:lnTo>
-                  <a:pt x="6111383" y="776121"/>
-                </a:lnTo>
-                <a:lnTo>
-                  <a:pt x="6071539" y="804338"/>
-                </a:lnTo>
-                <a:lnTo>
-                  <a:pt x="6028983" y="827820"/>
-                </a:lnTo>
-                <a:lnTo>
-                  <a:pt x="5984143" y="846392"/>
-                </a:lnTo>
-                <a:lnTo>
-                  <a:pt x="5937445" y="859875"/>
-                </a:lnTo>
-                <a:lnTo>
-                  <a:pt x="5889315" y="868095"/>
-                </a:lnTo>
-                <a:lnTo>
-                  <a:pt x="5840180" y="870874"/>
-                </a:lnTo>
-                <a:close/>
-              </a:path>
-            </a:pathLst>
-          </a:custGeom>
-          <a:solidFill>
-            <a:srgbClr val="FFFFFF"/>
-          </a:solidFill>
-        </p:spPr>
-        <p:txBody>
-          <a:bodyPr wrap="square" lIns="0" tIns="0" rIns="0" bIns="0" rtlCol="0"/>
-          <a:lstStyle/>
-          <a:p>
-            <a:endParaRPr/>
-          </a:p>
-        </p:txBody>
-      </p:sp>
-      <p:sp>
-        <p:nvSpPr>
-          <p:cNvPr id="14" name="object 14"/>
-          <p:cNvSpPr txBox="1"/>
-          <p:nvPr/>
-        </p:nvSpPr>
-        <p:spPr>
-          <a:xfrm>
-            <a:off x="11407133" y="2229808"/>
-            <a:ext cx="3437890" cy="2558415"/>
-          </a:xfrm>
-          <a:prstGeom prst="rect">
-            <a:avLst/>
-          </a:prstGeom>
-        </p:spPr>
-        <p:txBody>
-          <a:bodyPr vert="horz" wrap="square" lIns="0" tIns="13970" rIns="0" bIns="0" rtlCol="0">
-            <a:spAutoFit/>
-          </a:bodyPr>
-          <a:lstStyle/>
-          <a:p>
-            <a:pPr marL="561975">
-              <a:lnSpc>
-                <a:spcPct val="100000"/>
-              </a:lnSpc>
-              <a:spcBef>
-                <a:spcPts val="110"/>
-              </a:spcBef>
-            </a:pPr>
-            <a:r>
-              <a:rPr sz="2400" spc="-190" dirty="0">
-                <a:solidFill>
-                  <a:srgbClr val="6D8599"/>
-                </a:solidFill>
-                <a:latin typeface="Arial Black"/>
-                <a:cs typeface="Arial Black"/>
-              </a:rPr>
-              <a:t>AI</a:t>
-            </a:r>
-            <a:r>
-              <a:rPr sz="2400" spc="-225" dirty="0">
-                <a:solidFill>
-                  <a:srgbClr val="6D8599"/>
-                </a:solidFill>
-                <a:latin typeface="Arial Black"/>
-                <a:cs typeface="Arial Black"/>
-              </a:rPr>
-              <a:t> </a:t>
-            </a:r>
-            <a:r>
-              <a:rPr sz="2700" b="1" spc="-470" dirty="0">
-                <a:solidFill>
-                  <a:srgbClr val="6D8599"/>
-                </a:solidFill>
-                <a:latin typeface="Malgun Gothic"/>
-                <a:cs typeface="Malgun Gothic"/>
-              </a:rPr>
-              <a:t>서비스</a:t>
-            </a:r>
-            <a:r>
-              <a:rPr sz="2700" b="1" spc="-475" dirty="0">
-                <a:solidFill>
-                  <a:srgbClr val="6D8599"/>
-                </a:solidFill>
-                <a:latin typeface="Malgun Gothic"/>
-                <a:cs typeface="Malgun Gothic"/>
-              </a:rPr>
-              <a:t> </a:t>
-            </a:r>
-            <a:r>
-              <a:rPr sz="2700" b="1" spc="-495" dirty="0">
-                <a:solidFill>
-                  <a:srgbClr val="6D8599"/>
-                </a:solidFill>
-                <a:latin typeface="Malgun Gothic"/>
-                <a:cs typeface="Malgun Gothic"/>
-              </a:rPr>
-              <a:t>기획안</a:t>
-            </a:r>
-            <a:endParaRPr sz="2700" dirty="0">
-              <a:latin typeface="Malgun Gothic"/>
-              <a:cs typeface="Malgun Gothic"/>
-            </a:endParaRPr>
-          </a:p>
-          <a:p>
-            <a:pPr marL="12700" marR="5080" indent="316230">
-              <a:lnSpc>
-                <a:spcPts val="8660"/>
-              </a:lnSpc>
-              <a:spcBef>
-                <a:spcPts val="365"/>
-              </a:spcBef>
-            </a:pPr>
-            <a:r>
-              <a:rPr sz="2400" spc="-200" dirty="0">
-                <a:solidFill>
-                  <a:srgbClr val="231F20"/>
-                </a:solidFill>
-                <a:latin typeface="Verdana"/>
-                <a:cs typeface="Verdana"/>
-              </a:rPr>
-              <a:t>(a4</a:t>
-            </a:r>
-            <a:r>
-              <a:rPr sz="2400" spc="-400" dirty="0">
-                <a:solidFill>
-                  <a:srgbClr val="231F20"/>
-                </a:solidFill>
-                <a:latin typeface="Verdana"/>
-                <a:cs typeface="Verdana"/>
-              </a:rPr>
-              <a:t> </a:t>
-            </a:r>
-            <a:r>
-              <a:rPr sz="2700" spc="-585" dirty="0">
-                <a:solidFill>
-                  <a:srgbClr val="231F20"/>
-                </a:solidFill>
-                <a:latin typeface="Malgun Gothic"/>
-                <a:cs typeface="Malgun Gothic"/>
-              </a:rPr>
-              <a:t>인쇄</a:t>
-            </a:r>
-            <a:r>
-              <a:rPr sz="2700" spc="-415" dirty="0">
-                <a:solidFill>
-                  <a:srgbClr val="231F20"/>
-                </a:solidFill>
-                <a:latin typeface="Malgun Gothic"/>
-                <a:cs typeface="Malgun Gothic"/>
-              </a:rPr>
-              <a:t> </a:t>
-            </a:r>
-            <a:r>
-              <a:rPr sz="2700" spc="-480" dirty="0">
-                <a:solidFill>
-                  <a:srgbClr val="231F20"/>
-                </a:solidFill>
-                <a:latin typeface="Malgun Gothic"/>
-                <a:cs typeface="Malgun Gothic"/>
-              </a:rPr>
-              <a:t>기준</a:t>
-            </a:r>
-            <a:r>
-              <a:rPr sz="2400" spc="-480" dirty="0">
-                <a:solidFill>
-                  <a:srgbClr val="231F20"/>
-                </a:solidFill>
-                <a:latin typeface="Verdana"/>
-                <a:cs typeface="Verdana"/>
-              </a:rPr>
-              <a:t>)</a:t>
-            </a:r>
-            <a:r>
-              <a:rPr sz="2400" spc="-400" dirty="0">
-                <a:solidFill>
-                  <a:srgbClr val="231F20"/>
-                </a:solidFill>
-                <a:latin typeface="Verdana"/>
-                <a:cs typeface="Verdana"/>
-              </a:rPr>
-              <a:t> </a:t>
-            </a:r>
-            <a:r>
-              <a:rPr sz="2400" spc="-95" dirty="0">
-                <a:solidFill>
-                  <a:srgbClr val="231F20"/>
-                </a:solidFill>
-                <a:latin typeface="Verdana"/>
-                <a:cs typeface="Verdana"/>
-              </a:rPr>
-              <a:t>2P</a:t>
-            </a:r>
-            <a:r>
-              <a:rPr sz="2400" spc="-400" dirty="0">
-                <a:solidFill>
-                  <a:srgbClr val="231F20"/>
-                </a:solidFill>
-                <a:latin typeface="Verdana"/>
-                <a:cs typeface="Verdana"/>
-              </a:rPr>
-              <a:t> </a:t>
-            </a:r>
-            <a:r>
-              <a:rPr sz="2700" spc="-610" dirty="0">
-                <a:solidFill>
-                  <a:srgbClr val="231F20"/>
-                </a:solidFill>
-                <a:latin typeface="Malgun Gothic"/>
-                <a:cs typeface="Malgun Gothic"/>
-              </a:rPr>
-              <a:t>이내 </a:t>
-            </a:r>
-            <a:r>
-              <a:rPr sz="2400" spc="-120" dirty="0">
-                <a:solidFill>
-                  <a:srgbClr val="231F20"/>
-                </a:solidFill>
-                <a:latin typeface="Verdana"/>
-                <a:cs typeface="Verdana"/>
-              </a:rPr>
-              <a:t>Markdown,</a:t>
-            </a:r>
-            <a:r>
-              <a:rPr sz="2400" spc="-375" dirty="0">
-                <a:solidFill>
-                  <a:srgbClr val="231F20"/>
-                </a:solidFill>
-                <a:latin typeface="Verdana"/>
-                <a:cs typeface="Verdana"/>
-              </a:rPr>
-              <a:t> </a:t>
-            </a:r>
-            <a:r>
-              <a:rPr sz="2400" spc="-130" dirty="0">
-                <a:solidFill>
-                  <a:srgbClr val="231F20"/>
-                </a:solidFill>
-                <a:latin typeface="Verdana"/>
-                <a:cs typeface="Verdana"/>
-              </a:rPr>
-              <a:t>Word,</a:t>
-            </a:r>
-            <a:r>
-              <a:rPr sz="2400" spc="-370" dirty="0">
-                <a:solidFill>
-                  <a:srgbClr val="231F20"/>
-                </a:solidFill>
-                <a:latin typeface="Verdana"/>
-                <a:cs typeface="Verdana"/>
-              </a:rPr>
-              <a:t> </a:t>
-            </a:r>
-            <a:r>
-              <a:rPr sz="2700" spc="-509" dirty="0">
-                <a:solidFill>
-                  <a:srgbClr val="231F20"/>
-                </a:solidFill>
-                <a:latin typeface="Malgun Gothic"/>
-                <a:cs typeface="Malgun Gothic"/>
-              </a:rPr>
-              <a:t>한글</a:t>
-            </a:r>
-            <a:r>
-              <a:rPr sz="2700" spc="-550" dirty="0">
-                <a:solidFill>
-                  <a:srgbClr val="231F20"/>
-                </a:solidFill>
-                <a:latin typeface="Malgun Gothic"/>
-                <a:cs typeface="Malgun Gothic"/>
-              </a:rPr>
-              <a:t> </a:t>
-            </a:r>
-            <a:r>
-              <a:rPr sz="2700" spc="-484" dirty="0">
-                <a:solidFill>
-                  <a:srgbClr val="231F20"/>
-                </a:solidFill>
-                <a:latin typeface="Malgun Gothic"/>
-                <a:cs typeface="Malgun Gothic"/>
-              </a:rPr>
-              <a:t>등</a:t>
-            </a:r>
-            <a:endParaRPr sz="2700" dirty="0">
-              <a:latin typeface="Malgun Gothic"/>
-              <a:cs typeface="Malgun Gothic"/>
-            </a:endParaRPr>
-          </a:p>
-        </p:txBody>
-      </p:sp>
-      <p:grpSp>
-        <p:nvGrpSpPr>
-          <p:cNvPr id="8" name="object 8"/>
-          <p:cNvGrpSpPr/>
-          <p:nvPr/>
-        </p:nvGrpSpPr>
-        <p:grpSpPr>
-          <a:xfrm>
-            <a:off x="9338667" y="5953504"/>
-            <a:ext cx="7564120" cy="3416935"/>
-            <a:chOff x="9338667" y="5953504"/>
-            <a:chExt cx="7564120" cy="3416935"/>
-          </a:xfrm>
-        </p:grpSpPr>
-        <p:sp>
-          <p:nvSpPr>
-            <p:cNvPr id="9" name="object 9"/>
-            <p:cNvSpPr/>
-            <p:nvPr/>
-          </p:nvSpPr>
-          <p:spPr>
-            <a:xfrm>
-              <a:off x="9338667" y="6296499"/>
-              <a:ext cx="7564120" cy="3074035"/>
-            </a:xfrm>
-            <a:custGeom>
-              <a:avLst/>
-              <a:gdLst/>
-              <a:ahLst/>
-              <a:cxnLst/>
-              <a:rect l="l" t="t" r="r" b="b"/>
-              <a:pathLst>
-                <a:path w="7564119" h="3074034">
-                  <a:moveTo>
-                    <a:pt x="7090660" y="3073437"/>
-                  </a:moveTo>
-                  <a:lnTo>
-                    <a:pt x="476257" y="3073437"/>
-                  </a:lnTo>
-                  <a:lnTo>
-                    <a:pt x="427561" y="3070989"/>
-                  </a:lnTo>
-                  <a:lnTo>
-                    <a:pt x="380271" y="3063771"/>
-                  </a:lnTo>
-                  <a:lnTo>
-                    <a:pt x="334629" y="3052035"/>
-                  </a:lnTo>
-                  <a:lnTo>
-                    <a:pt x="290872" y="3036019"/>
-                  </a:lnTo>
-                  <a:lnTo>
-                    <a:pt x="249241" y="3015964"/>
-                  </a:lnTo>
-                  <a:lnTo>
-                    <a:pt x="209974" y="2992108"/>
-                  </a:lnTo>
-                  <a:lnTo>
-                    <a:pt x="173311" y="2964691"/>
-                  </a:lnTo>
-                  <a:lnTo>
-                    <a:pt x="139491" y="2933952"/>
-                  </a:lnTo>
-                  <a:lnTo>
-                    <a:pt x="108754" y="2900131"/>
-                  </a:lnTo>
-                  <a:lnTo>
-                    <a:pt x="81339" y="2863467"/>
-                  </a:lnTo>
-                  <a:lnTo>
-                    <a:pt x="57485" y="2824200"/>
-                  </a:lnTo>
-                  <a:lnTo>
-                    <a:pt x="37431" y="2782570"/>
-                  </a:lnTo>
-                  <a:lnTo>
-                    <a:pt x="21417" y="2738815"/>
-                  </a:lnTo>
-                  <a:lnTo>
-                    <a:pt x="9682" y="2693175"/>
-                  </a:lnTo>
-                  <a:lnTo>
-                    <a:pt x="2466" y="2645889"/>
-                  </a:lnTo>
-                  <a:lnTo>
-                    <a:pt x="0" y="2597198"/>
-                  </a:lnTo>
-                  <a:lnTo>
-                    <a:pt x="0" y="476247"/>
-                  </a:lnTo>
-                  <a:lnTo>
-                    <a:pt x="2466" y="427555"/>
-                  </a:lnTo>
-                  <a:lnTo>
-                    <a:pt x="9682" y="380270"/>
-                  </a:lnTo>
-                  <a:lnTo>
-                    <a:pt x="21417" y="334630"/>
-                  </a:lnTo>
-                  <a:lnTo>
-                    <a:pt x="37431" y="290875"/>
-                  </a:lnTo>
-                  <a:lnTo>
-                    <a:pt x="57485" y="249244"/>
-                  </a:lnTo>
-                  <a:lnTo>
-                    <a:pt x="81339" y="209977"/>
-                  </a:lnTo>
-                  <a:lnTo>
-                    <a:pt x="108754" y="173313"/>
-                  </a:lnTo>
-                  <a:lnTo>
-                    <a:pt x="139491" y="139493"/>
-                  </a:lnTo>
-                  <a:lnTo>
-                    <a:pt x="173311" y="108754"/>
-                  </a:lnTo>
-                  <a:lnTo>
-                    <a:pt x="209974" y="81337"/>
-                  </a:lnTo>
-                  <a:lnTo>
-                    <a:pt x="249241" y="57481"/>
-                  </a:lnTo>
-                  <a:lnTo>
-                    <a:pt x="290872" y="37425"/>
-                  </a:lnTo>
-                  <a:lnTo>
-                    <a:pt x="334629" y="21409"/>
-                  </a:lnTo>
-                  <a:lnTo>
-                    <a:pt x="380271" y="9673"/>
-                  </a:lnTo>
-                  <a:lnTo>
-                    <a:pt x="427561" y="2456"/>
-                  </a:lnTo>
-                  <a:lnTo>
-                    <a:pt x="476257" y="0"/>
-                  </a:lnTo>
-                  <a:lnTo>
-                    <a:pt x="7090660" y="0"/>
-                  </a:lnTo>
-                  <a:lnTo>
-                    <a:pt x="7139357" y="2456"/>
-                  </a:lnTo>
-                  <a:lnTo>
-                    <a:pt x="7186646" y="9673"/>
-                  </a:lnTo>
-                  <a:lnTo>
-                    <a:pt x="7232289" y="21409"/>
-                  </a:lnTo>
-                  <a:lnTo>
-                    <a:pt x="7276045" y="37425"/>
-                  </a:lnTo>
-                  <a:lnTo>
-                    <a:pt x="7317677" y="57481"/>
-                  </a:lnTo>
-                  <a:lnTo>
-                    <a:pt x="7356943" y="81337"/>
-                  </a:lnTo>
-                  <a:lnTo>
-                    <a:pt x="7393606" y="108754"/>
-                  </a:lnTo>
-                  <a:lnTo>
-                    <a:pt x="7427426" y="139493"/>
-                  </a:lnTo>
-                  <a:lnTo>
-                    <a:pt x="7458163" y="173313"/>
-                  </a:lnTo>
-                  <a:lnTo>
-                    <a:pt x="7485579" y="209977"/>
-                  </a:lnTo>
-                  <a:lnTo>
-                    <a:pt x="7509433" y="249244"/>
-                  </a:lnTo>
-                  <a:lnTo>
-                    <a:pt x="7529486" y="290875"/>
-                  </a:lnTo>
-                  <a:lnTo>
-                    <a:pt x="7545500" y="334630"/>
-                  </a:lnTo>
-                  <a:lnTo>
-                    <a:pt x="7557235" y="380270"/>
-                  </a:lnTo>
-                  <a:lnTo>
-                    <a:pt x="7563536" y="421558"/>
-                  </a:lnTo>
-                  <a:lnTo>
-                    <a:pt x="7563536" y="2651887"/>
-                  </a:lnTo>
-                  <a:lnTo>
-                    <a:pt x="7557235" y="2693175"/>
-                  </a:lnTo>
-                  <a:lnTo>
-                    <a:pt x="7545500" y="2738815"/>
-                  </a:lnTo>
-                  <a:lnTo>
-                    <a:pt x="7529486" y="2782570"/>
-                  </a:lnTo>
-                  <a:lnTo>
-                    <a:pt x="7509433" y="2824200"/>
-                  </a:lnTo>
-                  <a:lnTo>
-                    <a:pt x="7485579" y="2863467"/>
-                  </a:lnTo>
-                  <a:lnTo>
-                    <a:pt x="7458163" y="2900131"/>
-                  </a:lnTo>
-                  <a:lnTo>
-                    <a:pt x="7427426" y="2933952"/>
-                  </a:lnTo>
-                  <a:lnTo>
-                    <a:pt x="7393606" y="2964691"/>
-                  </a:lnTo>
-                  <a:lnTo>
-                    <a:pt x="7356943" y="2992108"/>
-                  </a:lnTo>
-                  <a:lnTo>
-                    <a:pt x="7317677" y="3015964"/>
-                  </a:lnTo>
-                  <a:lnTo>
-                    <a:pt x="7276045" y="3036019"/>
-                  </a:lnTo>
-                  <a:lnTo>
-                    <a:pt x="7232289" y="3052035"/>
-                  </a:lnTo>
-                  <a:lnTo>
-                    <a:pt x="7186646" y="3063771"/>
-                  </a:lnTo>
-                  <a:lnTo>
-                    <a:pt x="7139357" y="3070989"/>
-                  </a:lnTo>
-                  <a:lnTo>
-                    <a:pt x="7090660" y="3073437"/>
-                  </a:lnTo>
-                  <a:close/>
-                </a:path>
-              </a:pathLst>
-            </a:custGeom>
-            <a:solidFill>
-              <a:srgbClr val="F1F1F1"/>
-            </a:solidFill>
-          </p:spPr>
-          <p:txBody>
-            <a:bodyPr wrap="square" lIns="0" tIns="0" rIns="0" bIns="0" rtlCol="0"/>
-            <a:lstStyle/>
-            <a:p>
-              <a:endParaRPr/>
-            </a:p>
-          </p:txBody>
-        </p:sp>
-        <p:sp>
-          <p:nvSpPr>
-            <p:cNvPr id="10" name="object 10"/>
-            <p:cNvSpPr/>
-            <p:nvPr/>
-          </p:nvSpPr>
-          <p:spPr>
-            <a:xfrm>
-              <a:off x="12321162" y="5953504"/>
-              <a:ext cx="1602105" cy="686435"/>
-            </a:xfrm>
-            <a:custGeom>
-              <a:avLst/>
-              <a:gdLst/>
-              <a:ahLst/>
-              <a:cxnLst/>
-              <a:rect l="l" t="t" r="r" b="b"/>
-              <a:pathLst>
-                <a:path w="1602105" h="686434">
-                  <a:moveTo>
-                    <a:pt x="1258926" y="685989"/>
-                  </a:moveTo>
-                  <a:lnTo>
-                    <a:pt x="342993" y="685989"/>
-                  </a:lnTo>
-                  <a:lnTo>
-                    <a:pt x="289014" y="681716"/>
-                  </a:lnTo>
-                  <a:lnTo>
-                    <a:pt x="236849" y="669152"/>
-                  </a:lnTo>
-                  <a:lnTo>
-                    <a:pt x="187421" y="648678"/>
-                  </a:lnTo>
-                  <a:lnTo>
-                    <a:pt x="141651" y="620676"/>
-                  </a:lnTo>
-                  <a:lnTo>
-                    <a:pt x="100460" y="585527"/>
-                  </a:lnTo>
-                  <a:lnTo>
-                    <a:pt x="65312" y="544337"/>
-                  </a:lnTo>
-                  <a:lnTo>
-                    <a:pt x="37310" y="498567"/>
-                  </a:lnTo>
-                  <a:lnTo>
-                    <a:pt x="16836" y="449139"/>
-                  </a:lnTo>
-                  <a:lnTo>
-                    <a:pt x="4272" y="396975"/>
-                  </a:lnTo>
-                  <a:lnTo>
-                    <a:pt x="0" y="342995"/>
-                  </a:lnTo>
-                  <a:lnTo>
-                    <a:pt x="4272" y="289014"/>
-                  </a:lnTo>
-                  <a:lnTo>
-                    <a:pt x="16836" y="236850"/>
-                  </a:lnTo>
-                  <a:lnTo>
-                    <a:pt x="37310" y="187421"/>
-                  </a:lnTo>
-                  <a:lnTo>
-                    <a:pt x="65312" y="141651"/>
-                  </a:lnTo>
-                  <a:lnTo>
-                    <a:pt x="100460" y="100460"/>
-                  </a:lnTo>
-                  <a:lnTo>
-                    <a:pt x="141651" y="65312"/>
-                  </a:lnTo>
-                  <a:lnTo>
-                    <a:pt x="187421" y="37310"/>
-                  </a:lnTo>
-                  <a:lnTo>
-                    <a:pt x="236849" y="16836"/>
-                  </a:lnTo>
-                  <a:lnTo>
-                    <a:pt x="289014" y="4272"/>
-                  </a:lnTo>
-                  <a:lnTo>
-                    <a:pt x="342993" y="0"/>
-                  </a:lnTo>
-                  <a:lnTo>
-                    <a:pt x="1258926" y="0"/>
-                  </a:lnTo>
-                  <a:lnTo>
-                    <a:pt x="1312908" y="4272"/>
-                  </a:lnTo>
-                  <a:lnTo>
-                    <a:pt x="1365073" y="16836"/>
-                  </a:lnTo>
-                  <a:lnTo>
-                    <a:pt x="1414501" y="37310"/>
-                  </a:lnTo>
-                  <a:lnTo>
-                    <a:pt x="1460271" y="65312"/>
-                  </a:lnTo>
-                  <a:lnTo>
-                    <a:pt x="1501462" y="100460"/>
-                  </a:lnTo>
-                  <a:lnTo>
-                    <a:pt x="1536611" y="141651"/>
-                  </a:lnTo>
-                  <a:lnTo>
-                    <a:pt x="1564613" y="187421"/>
-                  </a:lnTo>
-                  <a:lnTo>
-                    <a:pt x="1585087" y="236850"/>
-                  </a:lnTo>
-                  <a:lnTo>
-                    <a:pt x="1597651" y="289014"/>
-                  </a:lnTo>
-                  <a:lnTo>
-                    <a:pt x="1601924" y="342995"/>
-                  </a:lnTo>
-                  <a:lnTo>
-                    <a:pt x="1597651" y="396975"/>
-                  </a:lnTo>
-                  <a:lnTo>
-                    <a:pt x="1585087" y="449139"/>
-                  </a:lnTo>
-                  <a:lnTo>
-                    <a:pt x="1564613" y="498567"/>
-                  </a:lnTo>
-                  <a:lnTo>
-                    <a:pt x="1536611" y="544337"/>
-                  </a:lnTo>
-                  <a:lnTo>
-                    <a:pt x="1501462" y="585527"/>
-                  </a:lnTo>
-                  <a:lnTo>
-                    <a:pt x="1460271" y="620676"/>
-                  </a:lnTo>
-                  <a:lnTo>
-                    <a:pt x="1414501" y="648678"/>
-                  </a:lnTo>
-                  <a:lnTo>
-                    <a:pt x="1365073" y="669152"/>
-                  </a:lnTo>
-                  <a:lnTo>
-                    <a:pt x="1312908" y="681716"/>
-                  </a:lnTo>
-                  <a:lnTo>
-                    <a:pt x="1258926" y="685989"/>
-                  </a:lnTo>
-                  <a:close/>
-                </a:path>
-              </a:pathLst>
-            </a:custGeom>
-            <a:solidFill>
-              <a:srgbClr val="D8D8D8">
-                <a:alpha val="69999"/>
-              </a:srgbClr>
-            </a:solidFill>
-          </p:spPr>
-          <p:txBody>
-            <a:bodyPr wrap="square" lIns="0" tIns="0" rIns="0" bIns="0" rtlCol="0"/>
-            <a:lstStyle/>
-            <a:p>
-              <a:endParaRPr/>
-            </a:p>
-          </p:txBody>
-        </p:sp>
-        <p:sp>
-          <p:nvSpPr>
-            <p:cNvPr id="11" name="object 11"/>
-            <p:cNvSpPr/>
-            <p:nvPr/>
-          </p:nvSpPr>
-          <p:spPr>
-            <a:xfrm>
-              <a:off x="10168179" y="6868095"/>
-              <a:ext cx="6275705" cy="1970405"/>
-            </a:xfrm>
-            <a:custGeom>
-              <a:avLst/>
-              <a:gdLst/>
-              <a:ahLst/>
-              <a:cxnLst/>
-              <a:rect l="l" t="t" r="r" b="b"/>
-              <a:pathLst>
-                <a:path w="6275705" h="1970404">
-                  <a:moveTo>
-                    <a:pt x="6275590" y="1534934"/>
-                  </a:moveTo>
-                  <a:lnTo>
-                    <a:pt x="6272809" y="1485811"/>
-                  </a:lnTo>
-                  <a:lnTo>
-                    <a:pt x="6264592" y="1437678"/>
-                  </a:lnTo>
-                  <a:lnTo>
-                    <a:pt x="6251105" y="1390980"/>
-                  </a:lnTo>
-                  <a:lnTo>
-                    <a:pt x="6232537" y="1346136"/>
-                  </a:lnTo>
-                  <a:lnTo>
-                    <a:pt x="6209055" y="1303578"/>
-                  </a:lnTo>
-                  <a:lnTo>
-                    <a:pt x="6180836" y="1263738"/>
-                  </a:lnTo>
-                  <a:lnTo>
-                    <a:pt x="6148057" y="1227035"/>
-                  </a:lnTo>
-                  <a:lnTo>
-                    <a:pt x="6111354" y="1194257"/>
-                  </a:lnTo>
-                  <a:lnTo>
-                    <a:pt x="6071514" y="1166037"/>
-                  </a:lnTo>
-                  <a:lnTo>
-                    <a:pt x="6028956" y="1142542"/>
-                  </a:lnTo>
-                  <a:lnTo>
-                    <a:pt x="5984113" y="1123962"/>
-                  </a:lnTo>
-                  <a:lnTo>
-                    <a:pt x="5937415" y="1110475"/>
-                  </a:lnTo>
-                  <a:lnTo>
-                    <a:pt x="5889295" y="1102258"/>
-                  </a:lnTo>
-                  <a:lnTo>
-                    <a:pt x="5840158" y="1099477"/>
-                  </a:lnTo>
-                  <a:lnTo>
-                    <a:pt x="435444" y="1099477"/>
-                  </a:lnTo>
-                  <a:lnTo>
-                    <a:pt x="386308" y="1102258"/>
-                  </a:lnTo>
-                  <a:lnTo>
-                    <a:pt x="338175" y="1110475"/>
-                  </a:lnTo>
-                  <a:lnTo>
-                    <a:pt x="291477" y="1123962"/>
-                  </a:lnTo>
-                  <a:lnTo>
-                    <a:pt x="246634" y="1142542"/>
-                  </a:lnTo>
-                  <a:lnTo>
-                    <a:pt x="204076" y="1166037"/>
-                  </a:lnTo>
-                  <a:lnTo>
-                    <a:pt x="164236" y="1194257"/>
-                  </a:lnTo>
-                  <a:lnTo>
-                    <a:pt x="127533" y="1227035"/>
-                  </a:lnTo>
-                  <a:lnTo>
-                    <a:pt x="94754" y="1263738"/>
-                  </a:lnTo>
-                  <a:lnTo>
-                    <a:pt x="66535" y="1303578"/>
-                  </a:lnTo>
-                  <a:lnTo>
-                    <a:pt x="43053" y="1346136"/>
-                  </a:lnTo>
-                  <a:lnTo>
-                    <a:pt x="24485" y="1390980"/>
-                  </a:lnTo>
-                  <a:lnTo>
-                    <a:pt x="10998" y="1437678"/>
-                  </a:lnTo>
-                  <a:lnTo>
-                    <a:pt x="2781" y="1485811"/>
-                  </a:lnTo>
-                  <a:lnTo>
-                    <a:pt x="0" y="1534934"/>
-                  </a:lnTo>
-                  <a:lnTo>
-                    <a:pt x="2781" y="1584071"/>
-                  </a:lnTo>
-                  <a:lnTo>
-                    <a:pt x="10998" y="1632204"/>
-                  </a:lnTo>
-                  <a:lnTo>
-                    <a:pt x="24485" y="1678889"/>
-                  </a:lnTo>
-                  <a:lnTo>
-                    <a:pt x="43053" y="1723720"/>
-                  </a:lnTo>
-                  <a:lnTo>
-                    <a:pt x="66535" y="1766277"/>
-                  </a:lnTo>
-                  <a:lnTo>
-                    <a:pt x="94754" y="1806117"/>
-                  </a:lnTo>
-                  <a:lnTo>
-                    <a:pt x="127533" y="1842820"/>
-                  </a:lnTo>
-                  <a:lnTo>
-                    <a:pt x="164236" y="1875612"/>
-                  </a:lnTo>
-                  <a:lnTo>
-                    <a:pt x="204076" y="1903831"/>
-                  </a:lnTo>
-                  <a:lnTo>
-                    <a:pt x="246634" y="1927313"/>
-                  </a:lnTo>
-                  <a:lnTo>
-                    <a:pt x="291477" y="1945894"/>
-                  </a:lnTo>
-                  <a:lnTo>
-                    <a:pt x="338175" y="1959381"/>
-                  </a:lnTo>
-                  <a:lnTo>
-                    <a:pt x="386308" y="1967598"/>
-                  </a:lnTo>
-                  <a:lnTo>
-                    <a:pt x="435444" y="1970379"/>
-                  </a:lnTo>
-                  <a:lnTo>
-                    <a:pt x="5840158" y="1970379"/>
-                  </a:lnTo>
-                  <a:lnTo>
-                    <a:pt x="5889295" y="1967598"/>
-                  </a:lnTo>
-                  <a:lnTo>
-                    <a:pt x="5937415" y="1959381"/>
-                  </a:lnTo>
-                  <a:lnTo>
-                    <a:pt x="5984113" y="1945894"/>
-                  </a:lnTo>
-                  <a:lnTo>
-                    <a:pt x="6028956" y="1927313"/>
-                  </a:lnTo>
-                  <a:lnTo>
-                    <a:pt x="6071514" y="1903831"/>
-                  </a:lnTo>
-                  <a:lnTo>
-                    <a:pt x="6111354" y="1875612"/>
-                  </a:lnTo>
-                  <a:lnTo>
-                    <a:pt x="6148057" y="1842820"/>
-                  </a:lnTo>
-                  <a:lnTo>
-                    <a:pt x="6180836" y="1806117"/>
-                  </a:lnTo>
-                  <a:lnTo>
-                    <a:pt x="6209055" y="1766277"/>
-                  </a:lnTo>
-                  <a:lnTo>
-                    <a:pt x="6232537" y="1723720"/>
-                  </a:lnTo>
-                  <a:lnTo>
-                    <a:pt x="6251105" y="1678889"/>
-                  </a:lnTo>
-                  <a:lnTo>
-                    <a:pt x="6264592" y="1632204"/>
-                  </a:lnTo>
-                  <a:lnTo>
-                    <a:pt x="6272809" y="1584071"/>
-                  </a:lnTo>
-                  <a:lnTo>
-                    <a:pt x="6275590" y="1534934"/>
-                  </a:lnTo>
-                  <a:close/>
-                </a:path>
-                <a:path w="6275705" h="1970404">
-                  <a:moveTo>
-                    <a:pt x="6275590" y="435432"/>
-                  </a:moveTo>
-                  <a:lnTo>
-                    <a:pt x="6272809" y="386308"/>
-                  </a:lnTo>
-                  <a:lnTo>
-                    <a:pt x="6264592" y="338175"/>
-                  </a:lnTo>
-                  <a:lnTo>
-                    <a:pt x="6251105" y="291490"/>
-                  </a:lnTo>
-                  <a:lnTo>
-                    <a:pt x="6232537" y="246646"/>
-                  </a:lnTo>
-                  <a:lnTo>
-                    <a:pt x="6209055" y="204101"/>
-                  </a:lnTo>
-                  <a:lnTo>
-                    <a:pt x="6180836" y="164261"/>
-                  </a:lnTo>
-                  <a:lnTo>
-                    <a:pt x="6148057" y="127558"/>
-                  </a:lnTo>
-                  <a:lnTo>
-                    <a:pt x="6111354" y="94767"/>
-                  </a:lnTo>
-                  <a:lnTo>
-                    <a:pt x="6071514" y="66548"/>
-                  </a:lnTo>
-                  <a:lnTo>
-                    <a:pt x="6028956" y="43053"/>
-                  </a:lnTo>
-                  <a:lnTo>
-                    <a:pt x="5984113" y="24485"/>
-                  </a:lnTo>
-                  <a:lnTo>
-                    <a:pt x="5937415" y="10998"/>
-                  </a:lnTo>
-                  <a:lnTo>
-                    <a:pt x="5889295" y="2781"/>
-                  </a:lnTo>
-                  <a:lnTo>
-                    <a:pt x="5840158" y="0"/>
-                  </a:lnTo>
-                  <a:lnTo>
-                    <a:pt x="435444" y="0"/>
-                  </a:lnTo>
-                  <a:lnTo>
-                    <a:pt x="386308" y="2781"/>
-                  </a:lnTo>
-                  <a:lnTo>
-                    <a:pt x="338175" y="10998"/>
-                  </a:lnTo>
-                  <a:lnTo>
-                    <a:pt x="291477" y="24485"/>
-                  </a:lnTo>
-                  <a:lnTo>
-                    <a:pt x="246634" y="43053"/>
-                  </a:lnTo>
-                  <a:lnTo>
-                    <a:pt x="204076" y="66548"/>
-                  </a:lnTo>
-                  <a:lnTo>
-                    <a:pt x="164236" y="94767"/>
-                  </a:lnTo>
-                  <a:lnTo>
-                    <a:pt x="127533" y="127558"/>
-                  </a:lnTo>
-                  <a:lnTo>
-                    <a:pt x="94754" y="164261"/>
-                  </a:lnTo>
-                  <a:lnTo>
-                    <a:pt x="66535" y="204101"/>
-                  </a:lnTo>
-                  <a:lnTo>
-                    <a:pt x="43053" y="246646"/>
-                  </a:lnTo>
-                  <a:lnTo>
-                    <a:pt x="24485" y="291490"/>
-                  </a:lnTo>
-                  <a:lnTo>
-                    <a:pt x="10998" y="338175"/>
-                  </a:lnTo>
-                  <a:lnTo>
-                    <a:pt x="2781" y="386308"/>
-                  </a:lnTo>
-                  <a:lnTo>
-                    <a:pt x="0" y="435432"/>
-                  </a:lnTo>
-                  <a:lnTo>
-                    <a:pt x="2781" y="484568"/>
-                  </a:lnTo>
-                  <a:lnTo>
-                    <a:pt x="10998" y="532701"/>
-                  </a:lnTo>
-                  <a:lnTo>
-                    <a:pt x="24485" y="579399"/>
-                  </a:lnTo>
-                  <a:lnTo>
-                    <a:pt x="43053" y="624243"/>
-                  </a:lnTo>
-                  <a:lnTo>
-                    <a:pt x="66535" y="666788"/>
-                  </a:lnTo>
-                  <a:lnTo>
-                    <a:pt x="94754" y="706640"/>
-                  </a:lnTo>
-                  <a:lnTo>
-                    <a:pt x="127533" y="743343"/>
-                  </a:lnTo>
-                  <a:lnTo>
-                    <a:pt x="164236" y="776122"/>
-                  </a:lnTo>
-                  <a:lnTo>
-                    <a:pt x="204076" y="804341"/>
-                  </a:lnTo>
-                  <a:lnTo>
-                    <a:pt x="246634" y="827824"/>
-                  </a:lnTo>
-                  <a:lnTo>
-                    <a:pt x="291477" y="846391"/>
-                  </a:lnTo>
-                  <a:lnTo>
-                    <a:pt x="338175" y="859878"/>
-                  </a:lnTo>
-                  <a:lnTo>
-                    <a:pt x="386308" y="868095"/>
-                  </a:lnTo>
-                  <a:lnTo>
-                    <a:pt x="435444" y="870877"/>
-                  </a:lnTo>
-                  <a:lnTo>
-                    <a:pt x="5840158" y="870877"/>
-                  </a:lnTo>
-                  <a:lnTo>
-                    <a:pt x="5889295" y="868095"/>
-                  </a:lnTo>
-                  <a:lnTo>
-                    <a:pt x="5937415" y="859878"/>
-                  </a:lnTo>
-                  <a:lnTo>
-                    <a:pt x="5984113" y="846391"/>
-                  </a:lnTo>
-                  <a:lnTo>
-                    <a:pt x="6028956" y="827824"/>
-                  </a:lnTo>
-                  <a:lnTo>
-                    <a:pt x="6071514" y="804341"/>
-                  </a:lnTo>
-                  <a:lnTo>
-                    <a:pt x="6111354" y="776122"/>
-                  </a:lnTo>
-                  <a:lnTo>
-                    <a:pt x="6148057" y="743343"/>
-                  </a:lnTo>
-                  <a:lnTo>
-                    <a:pt x="6180836" y="706640"/>
-                  </a:lnTo>
-                  <a:lnTo>
-                    <a:pt x="6209055" y="666788"/>
-                  </a:lnTo>
-                  <a:lnTo>
-                    <a:pt x="6232537" y="624243"/>
-                  </a:lnTo>
-                  <a:lnTo>
-                    <a:pt x="6251105" y="579399"/>
-                  </a:lnTo>
-                  <a:lnTo>
-                    <a:pt x="6264592" y="532701"/>
-                  </a:lnTo>
-                  <a:lnTo>
-                    <a:pt x="6272809" y="484568"/>
-                  </a:lnTo>
-                  <a:lnTo>
-                    <a:pt x="6275590" y="435432"/>
-                  </a:lnTo>
-                  <a:close/>
-                </a:path>
-              </a:pathLst>
-            </a:custGeom>
-            <a:solidFill>
-              <a:srgbClr val="FFFFFF"/>
-            </a:solidFill>
-          </p:spPr>
-          <p:txBody>
-            <a:bodyPr wrap="square" lIns="0" tIns="0" rIns="0" bIns="0" rtlCol="0"/>
-            <a:lstStyle/>
-            <a:p>
-              <a:endParaRPr/>
-            </a:p>
-          </p:txBody>
-        </p:sp>
-      </p:grpSp>
-      <p:sp>
-        <p:nvSpPr>
-          <p:cNvPr id="16" name="object 16"/>
-          <p:cNvSpPr txBox="1"/>
-          <p:nvPr/>
-        </p:nvSpPr>
-        <p:spPr>
-          <a:xfrm>
-            <a:off x="12389897" y="6053780"/>
-            <a:ext cx="1832610" cy="2536190"/>
-          </a:xfrm>
-          <a:prstGeom prst="rect">
-            <a:avLst/>
-          </a:prstGeom>
-        </p:spPr>
-        <p:txBody>
-          <a:bodyPr vert="horz" wrap="square" lIns="0" tIns="13970" rIns="0" bIns="0" rtlCol="0">
-            <a:spAutoFit/>
-          </a:bodyPr>
-          <a:lstStyle/>
-          <a:p>
-            <a:pPr marL="170815">
-              <a:lnSpc>
-                <a:spcPct val="100000"/>
-              </a:lnSpc>
-              <a:spcBef>
-                <a:spcPts val="110"/>
-              </a:spcBef>
-            </a:pPr>
-            <a:r>
-              <a:rPr sz="2700" b="1" spc="-505" dirty="0">
-                <a:solidFill>
-                  <a:srgbClr val="6D8599"/>
-                </a:solidFill>
-                <a:latin typeface="Malgun Gothic"/>
-                <a:cs typeface="Malgun Gothic"/>
-              </a:rPr>
-              <a:t>발표자료</a:t>
-            </a:r>
-            <a:endParaRPr sz="2700">
-              <a:latin typeface="Malgun Gothic"/>
-              <a:cs typeface="Malgun Gothic"/>
-            </a:endParaRPr>
-          </a:p>
-          <a:p>
-            <a:pPr marL="12700" marR="5080" indent="321945">
-              <a:lnSpc>
-                <a:spcPts val="8660"/>
-              </a:lnSpc>
-              <a:spcBef>
-                <a:spcPts val="185"/>
-              </a:spcBef>
-            </a:pPr>
-            <a:r>
-              <a:rPr sz="2400" spc="-60" dirty="0">
-                <a:solidFill>
-                  <a:srgbClr val="231F20"/>
-                </a:solidFill>
-                <a:latin typeface="Verdana"/>
-                <a:cs typeface="Verdana"/>
-              </a:rPr>
-              <a:t>10P</a:t>
-            </a:r>
-            <a:r>
-              <a:rPr sz="2400" spc="-390" dirty="0">
-                <a:solidFill>
-                  <a:srgbClr val="231F20"/>
-                </a:solidFill>
-                <a:latin typeface="Verdana"/>
-                <a:cs typeface="Verdana"/>
-              </a:rPr>
-              <a:t> </a:t>
-            </a:r>
-            <a:r>
-              <a:rPr sz="2700" spc="-610" dirty="0">
-                <a:solidFill>
-                  <a:srgbClr val="231F20"/>
-                </a:solidFill>
-                <a:latin typeface="Malgun Gothic"/>
-                <a:cs typeface="Malgun Gothic"/>
-              </a:rPr>
-              <a:t>이내 </a:t>
-            </a:r>
-            <a:r>
-              <a:rPr sz="2400" spc="-10" dirty="0">
-                <a:solidFill>
-                  <a:srgbClr val="231F20"/>
-                </a:solidFill>
-                <a:latin typeface="Verdana"/>
-                <a:cs typeface="Verdana"/>
-              </a:rPr>
-              <a:t>PPT</a:t>
-            </a:r>
-            <a:r>
-              <a:rPr sz="2400" spc="-405" dirty="0">
-                <a:solidFill>
-                  <a:srgbClr val="231F20"/>
-                </a:solidFill>
-                <a:latin typeface="Verdana"/>
-                <a:cs typeface="Verdana"/>
-              </a:rPr>
-              <a:t> </a:t>
-            </a:r>
-            <a:r>
-              <a:rPr sz="2700" spc="-505" dirty="0">
-                <a:solidFill>
-                  <a:srgbClr val="231F20"/>
-                </a:solidFill>
-                <a:latin typeface="Malgun Gothic"/>
-                <a:cs typeface="Malgun Gothic"/>
-              </a:rPr>
-              <a:t>또는</a:t>
-            </a:r>
-            <a:r>
-              <a:rPr sz="2700" spc="-575" dirty="0">
-                <a:solidFill>
-                  <a:srgbClr val="231F20"/>
-                </a:solidFill>
-                <a:latin typeface="Malgun Gothic"/>
-                <a:cs typeface="Malgun Gothic"/>
-              </a:rPr>
-              <a:t> </a:t>
-            </a:r>
-            <a:r>
-              <a:rPr sz="2400" spc="-25" dirty="0">
-                <a:solidFill>
-                  <a:srgbClr val="231F20"/>
-                </a:solidFill>
-                <a:latin typeface="Verdana"/>
-                <a:cs typeface="Verdana"/>
-              </a:rPr>
-              <a:t>PDF</a:t>
-            </a:r>
-            <a:endParaRPr sz="2400">
-              <a:latin typeface="Verdana"/>
-              <a:cs typeface="Verdana"/>
-            </a:endParaRPr>
-          </a:p>
-        </p:txBody>
-      </p:sp>
     </p:spTree>
   </p:cSld>
   <p:clrMapOvr>
